--- a/data-journalism/데이터저널리즘_이론과실무_022826.pptx
+++ b/data-journalism/데이터저널리즘_이론과실무_022826.pptx
@@ -15161,12 +15161,12 @@
                 <a:latin typeface="Arial" pitchFamily="34" charset="0"/>
                 <a:ea typeface="Arial" pitchFamily="34" charset="-122"/>
                 <a:cs typeface="Arial" pitchFamily="34" charset="-120"/>
-                <a:hlinkClick r:id="rId4"/>
+                <a:hlinkClick r:id="rId5"/>
               </a:rPr>
               <a:t>패션 잡지 피부색 분석</a:t>
             </a:r>
             <a:endParaRPr lang="en-US" sz="1300" dirty="0">
-              <a:hlinkClick r:id="rId4"/>
+              <a:hlinkClick r:id="rId5"/>
             </a:endParaRPr>
           </a:p>
           <a:p>
@@ -15181,7 +15181,7 @@
                 <a:latin typeface="Arial" pitchFamily="34" charset="0"/>
                 <a:ea typeface="Arial" pitchFamily="34" charset="-122"/>
                 <a:cs typeface="Arial" pitchFamily="34" charset="-120"/>
-                <a:hlinkClick r:id="rId4"/>
+                <a:hlinkClick r:id="rId5"/>
               </a:rPr>
               <a:t>(The Pudding, 2019)</a:t>
             </a:r>
@@ -15332,12 +15332,12 @@
                 <a:latin typeface="Arial" pitchFamily="34" charset="0"/>
                 <a:ea typeface="Arial" pitchFamily="34" charset="-122"/>
                 <a:cs typeface="Arial" pitchFamily="34" charset="-120"/>
-                <a:hlinkClick r:id="rId5"/>
+                <a:hlinkClick r:id="rId6"/>
               </a:rPr>
               <a:t>AI 데이터센터 전기료 분석</a:t>
             </a:r>
             <a:endParaRPr lang="en-US" sz="1300" dirty="0">
-              <a:hlinkClick r:id="rId5"/>
+              <a:hlinkClick r:id="rId6"/>
             </a:endParaRPr>
           </a:p>
           <a:p>
@@ -15352,7 +15352,7 @@
                 <a:latin typeface="Arial" pitchFamily="34" charset="0"/>
                 <a:ea typeface="Arial" pitchFamily="34" charset="-122"/>
                 <a:cs typeface="Arial" pitchFamily="34" charset="-120"/>
-                <a:hlinkClick r:id="rId5"/>
+                <a:hlinkClick r:id="rId6"/>
               </a:rPr>
               <a:t>(Bloomberg, 2025)</a:t>
             </a:r>
@@ -15883,12 +15883,12 @@
                 <a:latin typeface="Arial" pitchFamily="34" charset="0"/>
                 <a:ea typeface="Arial" pitchFamily="34" charset="-122"/>
                 <a:cs typeface="Arial" pitchFamily="34" charset="-120"/>
-                <a:hlinkClick r:id="rId3"/>
+                <a:hlinkClick r:id="rId4"/>
               </a:rPr>
               <a:t>페이스북 알고리즘 감시</a:t>
             </a:r>
             <a:endParaRPr lang="en-US" sz="1300" dirty="0">
-              <a:hlinkClick r:id="rId3"/>
+              <a:hlinkClick r:id="rId4"/>
             </a:endParaRPr>
           </a:p>
           <a:p>
@@ -15903,7 +15903,7 @@
                 <a:latin typeface="Arial" pitchFamily="34" charset="0"/>
                 <a:ea typeface="Arial" pitchFamily="34" charset="-122"/>
                 <a:cs typeface="Arial" pitchFamily="34" charset="-120"/>
-                <a:hlinkClick r:id="rId3"/>
+                <a:hlinkClick r:id="rId4"/>
               </a:rPr>
               <a:t>(The Markup, 2021)</a:t>
             </a:r>
@@ -16054,12 +16054,12 @@
                 <a:latin typeface="Arial" pitchFamily="34" charset="0"/>
                 <a:ea typeface="Arial" pitchFamily="34" charset="-122"/>
                 <a:cs typeface="Arial" pitchFamily="34" charset="-120"/>
-                <a:hlinkClick r:id="rId3"/>
+                <a:hlinkClick r:id="rId5"/>
               </a:rPr>
               <a:t>코로나 전파 시뮬레이터</a:t>
             </a:r>
             <a:endParaRPr lang="en-US" sz="1300" dirty="0">
-              <a:hlinkClick r:id="rId3"/>
+              <a:hlinkClick r:id="rId5"/>
             </a:endParaRPr>
           </a:p>
           <a:p>
@@ -16074,7 +16074,7 @@
                 <a:latin typeface="Arial" pitchFamily="34" charset="0"/>
                 <a:ea typeface="Arial" pitchFamily="34" charset="-122"/>
                 <a:cs typeface="Arial" pitchFamily="34" charset="-120"/>
-                <a:hlinkClick r:id="rId3"/>
+                <a:hlinkClick r:id="rId5"/>
               </a:rPr>
               <a:t>(Washington Post, 2020)</a:t>
             </a:r>
@@ -16225,7 +16225,7 @@
                 <a:latin typeface="Arial" pitchFamily="34" charset="0"/>
                 <a:ea typeface="Arial" pitchFamily="34" charset="-122"/>
                 <a:cs typeface="Arial" pitchFamily="34" charset="-120"/>
-                <a:hlinkClick r:id="rId4"/>
+                <a:hlinkClick r:id="rId6"/>
               </a:rPr>
               <a:t>AI로</a:t>
             </a:r>
@@ -16237,12 +16237,12 @@
                 <a:latin typeface="Arial" pitchFamily="34" charset="0"/>
                 <a:ea typeface="Arial" pitchFamily="34" charset="-122"/>
                 <a:cs typeface="Arial" pitchFamily="34" charset="-120"/>
-                <a:hlinkClick r:id="rId4"/>
+                <a:hlinkClick r:id="rId6"/>
               </a:rPr>
               <a:t> 수백 시간 인터뷰 분석</a:t>
             </a:r>
             <a:endParaRPr lang="en-US" sz="1300" dirty="0">
-              <a:hlinkClick r:id="rId4"/>
+              <a:hlinkClick r:id="rId6"/>
             </a:endParaRPr>
           </a:p>
           <a:p>
@@ -16257,7 +16257,7 @@
                 <a:latin typeface="Arial" pitchFamily="34" charset="0"/>
                 <a:ea typeface="Arial" pitchFamily="34" charset="-122"/>
                 <a:cs typeface="Arial" pitchFamily="34" charset="-120"/>
-                <a:hlinkClick r:id="rId4"/>
+                <a:hlinkClick r:id="rId6"/>
               </a:rPr>
               <a:t>(New York Times, 2025)</a:t>
             </a:r>
@@ -16323,7 +16323,57 @@
                 <a:ea typeface="Arial" pitchFamily="34" charset="-122"/>
                 <a:cs typeface="Arial" pitchFamily="34" charset="-120"/>
               </a:rPr>
-              <a:t>"물리적으로 불가능한 청취"를 AI가 해결 — Dylan Freedman</a:t>
+              <a:t>"물리적으로 불가능한 청취"를 AI가 해결 — </a:t>
+            </a:r>
+            <a:r>
+              <a:rPr lang="ko-KR" altLang="en-US" sz="1000" b="0" i="0" dirty="0">
+                <a:solidFill>
+                  <a:srgbClr val="0A0A0A"/>
+                </a:solidFill>
+                <a:effectLst/>
+                <a:latin typeface="Arial" panose="020B0604020202020204" pitchFamily="34" charset="0"/>
+              </a:rPr>
+              <a:t> </a:t>
+            </a:r>
+            <a:r>
+              <a:rPr lang="en-US" altLang="ko-KR" sz="1000" b="0" i="0" dirty="0">
+                <a:solidFill>
+                  <a:srgbClr val="0A0A0A"/>
+                </a:solidFill>
+                <a:effectLst/>
+                <a:latin typeface="Arial" panose="020B0604020202020204" pitchFamily="34" charset="0"/>
+              </a:rPr>
+              <a:t>'Cheat Sheet'</a:t>
+            </a:r>
+            <a:r>
+              <a:rPr lang="ko-KR" altLang="en-US" sz="1000" b="0" i="0" dirty="0">
+                <a:solidFill>
+                  <a:srgbClr val="0A0A0A"/>
+                </a:solidFill>
+                <a:effectLst/>
+                <a:latin typeface="Arial" panose="020B0604020202020204" pitchFamily="34" charset="0"/>
+              </a:rPr>
+              <a:t>라는 내부 </a:t>
+            </a:r>
+            <a:r>
+              <a:rPr lang="en-US" altLang="ko-KR" sz="1000" b="0" i="0" dirty="0">
+                <a:solidFill>
+                  <a:srgbClr val="0A0A0A"/>
+                </a:solidFill>
+                <a:effectLst/>
+                <a:latin typeface="Arial" panose="020B0604020202020204" pitchFamily="34" charset="0"/>
+              </a:rPr>
+              <a:t>AI </a:t>
+            </a:r>
+            <a:r>
+              <a:rPr lang="ko-KR" altLang="en-US" sz="1000" b="0" i="0" dirty="0">
+                <a:solidFill>
+                  <a:srgbClr val="0A0A0A"/>
+                </a:solidFill>
+                <a:effectLst/>
+                <a:latin typeface="Arial" panose="020B0604020202020204" pitchFamily="34" charset="0"/>
+              </a:rPr>
+              <a:t>도구 개발</a:t>
             </a:r>
             <a:endParaRPr lang="en-US" sz="1100" dirty="0"/>
           </a:p>
@@ -17882,9 +17932,66 @@
                 <a:ea typeface="Arial" pitchFamily="34" charset="-122"/>
                 <a:cs typeface="Arial" pitchFamily="34" charset="-120"/>
               </a:rPr>
-              <a:t>2003년 설립. 72개국 163개 회원사. 데이터저널리즘 지원. SIGMA Awards 시상. gijn.org</a:t>
-            </a:r>
-            <a:endParaRPr lang="en-US" sz="1200" dirty="0"/>
+              <a:t>2003년 설립. 72개국 163개 회원사. 데이터저널리즘 지원. SIGMA Awards 시상. </a:t>
+            </a:r>
+            <a:r>
+              <a:rPr lang="en-US" altLang="ko-KR" sz="1100" dirty="0">
+                <a:solidFill>
+                  <a:srgbClr val="000000"/>
+                </a:solidFill>
+                <a:latin typeface="Arial" pitchFamily="34" charset="0"/>
+                <a:ea typeface="Arial" pitchFamily="34" charset="-122"/>
+                <a:cs typeface="Arial" pitchFamily="34" charset="-120"/>
+                <a:hlinkClick r:id="rId3"/>
+              </a:rPr>
+              <a:t>Data</a:t>
+            </a:r>
+            <a:r>
+              <a:rPr lang="ko-KR" altLang="en-US" sz="1100" dirty="0">
+                <a:solidFill>
+                  <a:srgbClr val="000000"/>
+                </a:solidFill>
+                <a:latin typeface="Arial" pitchFamily="34" charset="0"/>
+                <a:ea typeface="Arial" pitchFamily="34" charset="-122"/>
+                <a:cs typeface="Arial" pitchFamily="34" charset="-120"/>
+                <a:hlinkClick r:id="rId3"/>
+              </a:rPr>
+              <a:t> </a:t>
+            </a:r>
+            <a:r>
+              <a:rPr lang="en-US" altLang="ko-KR" sz="1100" dirty="0">
+                <a:solidFill>
+                  <a:srgbClr val="000000"/>
+                </a:solidFill>
+                <a:latin typeface="Arial" pitchFamily="34" charset="0"/>
+                <a:ea typeface="Arial" pitchFamily="34" charset="-122"/>
+                <a:cs typeface="Arial" pitchFamily="34" charset="-120"/>
+                <a:hlinkClick r:id="rId3"/>
+              </a:rPr>
+              <a:t>Journalism Top 10</a:t>
+            </a:r>
+            <a:r>
+              <a:rPr lang="en-US" altLang="ko-KR" sz="1100" dirty="0">
+                <a:solidFill>
+                  <a:srgbClr val="000000"/>
+                </a:solidFill>
+                <a:latin typeface="Arial" pitchFamily="34" charset="0"/>
+                <a:ea typeface="Arial" pitchFamily="34" charset="-122"/>
+                <a:cs typeface="Arial" pitchFamily="34" charset="-120"/>
+              </a:rPr>
+              <a:t>. </a:t>
+            </a:r>
+            <a:r>
+              <a:rPr lang="en-US" sz="1100" dirty="0">
+                <a:solidFill>
+                  <a:srgbClr val="000000"/>
+                </a:solidFill>
+                <a:latin typeface="Arial" pitchFamily="34" charset="0"/>
+                <a:ea typeface="Arial" pitchFamily="34" charset="-122"/>
+                <a:cs typeface="Arial" pitchFamily="34" charset="-120"/>
+              </a:rPr>
+              <a:t>gijn.org</a:t>
+            </a:r>
           </a:p>
           <a:p>
             <a:pPr marL="0" indent="0">
@@ -17928,51 +18035,15 @@
               <a:t>1997년 설립. 60개국 160여명. 파나마 페이퍼스(2016) 등 세계적 협업 탐사보도. </a:t>
             </a:r>
             <a:r>
-              <a:rPr lang="en-US" sz="1100" dirty="0">
+              <a:rPr lang="en-US" altLang="ko-KR" sz="1100" dirty="0">
                 <a:solidFill>
                   <a:srgbClr val="000000"/>
                 </a:solidFill>
                 <a:latin typeface="Arial" pitchFamily="34" charset="0"/>
                 <a:ea typeface="Arial" pitchFamily="34" charset="-122"/>
                 <a:cs typeface="Arial" pitchFamily="34" charset="-120"/>
-                <a:hlinkClick r:id="rId3"/>
-              </a:rPr>
-              <a:t>Data</a:t>
-            </a:r>
-            <a:r>
-              <a:rPr lang="ko-KR" altLang="en-US" sz="1100" dirty="0">
-                <a:solidFill>
-                  <a:srgbClr val="000000"/>
-                </a:solidFill>
-                <a:latin typeface="Arial" pitchFamily="34" charset="0"/>
-                <a:ea typeface="Arial" pitchFamily="34" charset="-122"/>
-                <a:cs typeface="Arial" pitchFamily="34" charset="-120"/>
-                <a:hlinkClick r:id="rId3"/>
-              </a:rPr>
-              <a:t> </a:t>
-            </a:r>
-            <a:r>
-              <a:rPr lang="en-US" altLang="ko-KR" sz="1100" dirty="0">
-                <a:solidFill>
-                  <a:srgbClr val="000000"/>
-                </a:solidFill>
-                <a:latin typeface="Arial" pitchFamily="34" charset="0"/>
-                <a:ea typeface="Arial" pitchFamily="34" charset="-122"/>
-                <a:cs typeface="Arial" pitchFamily="34" charset="-120"/>
-                <a:hlinkClick r:id="rId3"/>
-              </a:rPr>
-              <a:t>Journalism Top 10</a:t>
-            </a:r>
-            <a:r>
-              <a:rPr lang="en-US" altLang="ko-KR" sz="1100" dirty="0">
-                <a:solidFill>
-                  <a:srgbClr val="000000"/>
-                </a:solidFill>
-                <a:latin typeface="Arial" pitchFamily="34" charset="0"/>
-                <a:ea typeface="Arial" pitchFamily="34" charset="-122"/>
-                <a:cs typeface="Arial" pitchFamily="34" charset="-120"/>
-              </a:rPr>
-              <a:t>.  icij.org </a:t>
+              </a:rPr>
+              <a:t>icij.org </a:t>
             </a:r>
             <a:endParaRPr lang="en-US" sz="1100" dirty="0">
               <a:solidFill>

--- a/data-journalism/데이터저널리즘_이론과실무_022826.pptx
+++ b/data-journalism/데이터저널리즘_이론과실무_022826.pptx
@@ -2096,6 +2096,10 @@
               <a:rPr lang="ko-KR" altLang="en-US" b="1" dirty="0"/>
               <a:t>무엇을 했는가</a:t>
             </a:r>
+            <a:r>
+              <a:rPr lang="ko-KR" altLang="en-US" dirty="0"/>
+              <a:t/>
+            </a:r>
             <a:br>
               <a:rPr lang="ko-KR" altLang="en-US" dirty="0"/>
             </a:br>
@@ -2137,6 +2141,10 @@
               <a:rPr lang="ko-KR" altLang="en-US" b="1" dirty="0"/>
               <a:t>구체적 의미</a:t>
             </a:r>
+            <a:r>
+              <a:rPr lang="ko-KR" altLang="en-US" dirty="0"/>
+              <a:t/>
+            </a:r>
             <a:br>
               <a:rPr lang="ko-KR" altLang="en-US" dirty="0"/>
             </a:br>
@@ -2166,6 +2174,10 @@
               <a:rPr lang="ko-KR" altLang="en-US" b="1" dirty="0"/>
               <a:t>중요한 전환점</a:t>
             </a:r>
+            <a:r>
+              <a:rPr lang="ko-KR" altLang="en-US" dirty="0"/>
+              <a:t/>
+            </a:r>
             <a:br>
               <a:rPr lang="ko-KR" altLang="en-US" dirty="0"/>
             </a:br>
@@ -2203,6 +2215,10 @@
               <a:rPr lang="ko-KR" altLang="en-US" b="1" dirty="0"/>
               <a:t>강의 핵심</a:t>
             </a:r>
+            <a:r>
+              <a:rPr lang="ko-KR" altLang="en-US" dirty="0"/>
+              <a:t/>
+            </a:r>
             <a:br>
               <a:rPr lang="ko-KR" altLang="en-US" dirty="0"/>
             </a:br>
@@ -2262,6 +2278,10 @@
               <a:rPr lang="ko-KR" altLang="en-US" b="1" dirty="0"/>
               <a:t>무엇을 했는가</a:t>
             </a:r>
+            <a:r>
+              <a:rPr lang="ko-KR" altLang="en-US" dirty="0"/>
+              <a:t/>
+            </a:r>
             <a:br>
               <a:rPr lang="ko-KR" altLang="en-US" dirty="0"/>
             </a:br>
@@ -2299,6 +2319,10 @@
               <a:rPr lang="ko-KR" altLang="en-US" b="1" dirty="0"/>
               <a:t>밝혀낸 것</a:t>
             </a:r>
+            <a:r>
+              <a:rPr lang="ko-KR" altLang="en-US" dirty="0"/>
+              <a:t/>
+            </a:r>
             <a:br>
               <a:rPr lang="ko-KR" altLang="en-US" dirty="0"/>
             </a:br>
@@ -2332,6 +2356,10 @@
               <a:rPr lang="ko-KR" altLang="en-US" b="1" dirty="0"/>
               <a:t>기존 보도와 차이</a:t>
             </a:r>
+            <a:r>
+              <a:rPr lang="ko-KR" altLang="en-US" dirty="0"/>
+              <a:t/>
+            </a:r>
             <a:br>
               <a:rPr lang="ko-KR" altLang="en-US" dirty="0"/>
             </a:br>
@@ -2369,6 +2397,10 @@
               <a:rPr lang="ko-KR" altLang="en-US" b="1" dirty="0"/>
               <a:t>강의 핵심</a:t>
             </a:r>
+            <a:r>
+              <a:rPr lang="ko-KR" altLang="en-US" dirty="0"/>
+              <a:t/>
+            </a:r>
             <a:br>
               <a:rPr lang="ko-KR" altLang="en-US" dirty="0"/>
             </a:br>
@@ -2436,6 +2468,10 @@
               <a:rPr lang="ko-KR" altLang="en-US" b="1" dirty="0"/>
               <a:t>무엇을 했는가</a:t>
             </a:r>
+            <a:r>
+              <a:rPr lang="ko-KR" altLang="en-US" dirty="0"/>
+              <a:t/>
+            </a:r>
             <a:br>
               <a:rPr lang="ko-KR" altLang="en-US" dirty="0"/>
             </a:br>
@@ -2465,6 +2501,10 @@
               <a:rPr lang="ko-KR" altLang="en-US" b="1" dirty="0"/>
               <a:t>밝혀낸 것</a:t>
             </a:r>
+            <a:r>
+              <a:rPr lang="ko-KR" altLang="en-US" dirty="0"/>
+              <a:t/>
+            </a:r>
             <a:br>
               <a:rPr lang="ko-KR" altLang="en-US" dirty="0"/>
             </a:br>
@@ -2502,6 +2542,10 @@
               <a:rPr lang="ko-KR" altLang="en-US" b="1" dirty="0"/>
               <a:t>의미</a:t>
             </a:r>
+            <a:r>
+              <a:rPr lang="ko-KR" altLang="en-US" dirty="0"/>
+              <a:t/>
+            </a:r>
             <a:br>
               <a:rPr lang="ko-KR" altLang="en-US" dirty="0"/>
             </a:br>
@@ -2531,6 +2575,10 @@
               <a:rPr lang="ko-KR" altLang="en-US" b="1" dirty="0"/>
               <a:t>강의 핵심</a:t>
             </a:r>
+            <a:r>
+              <a:rPr lang="ko-KR" altLang="en-US" dirty="0"/>
+              <a:t/>
+            </a:r>
             <a:br>
               <a:rPr lang="ko-KR" altLang="en-US" dirty="0"/>
             </a:br>
@@ -2582,6 +2630,10 @@
               <a:rPr lang="ko-KR" altLang="en-US" b="1" dirty="0"/>
               <a:t>무엇을 했는가</a:t>
             </a:r>
+            <a:r>
+              <a:rPr lang="ko-KR" altLang="en-US" dirty="0"/>
+              <a:t/>
+            </a:r>
             <a:br>
               <a:rPr lang="ko-KR" altLang="en-US" dirty="0"/>
             </a:br>
@@ -2619,6 +2671,10 @@
               <a:rPr lang="ko-KR" altLang="en-US" b="1" dirty="0"/>
               <a:t>밝혀낸 것</a:t>
             </a:r>
+            <a:r>
+              <a:rPr lang="ko-KR" altLang="en-US" dirty="0"/>
+              <a:t/>
+            </a:r>
             <a:br>
               <a:rPr lang="ko-KR" altLang="en-US" dirty="0"/>
             </a:br>
@@ -2640,6 +2696,10 @@
               <a:rPr lang="ko-KR" altLang="en-US" b="1" dirty="0"/>
               <a:t>파급효과</a:t>
             </a:r>
+            <a:r>
+              <a:rPr lang="ko-KR" altLang="en-US" dirty="0"/>
+              <a:t/>
+            </a:r>
             <a:br>
               <a:rPr lang="ko-KR" altLang="en-US" dirty="0"/>
             </a:br>
@@ -2661,6 +2721,10 @@
               <a:rPr lang="ko-KR" altLang="en-US" b="1" dirty="0"/>
               <a:t>강의 핵심</a:t>
             </a:r>
+            <a:r>
+              <a:rPr lang="ko-KR" altLang="en-US" dirty="0"/>
+              <a:t/>
+            </a:r>
             <a:br>
               <a:rPr lang="ko-KR" altLang="en-US" dirty="0"/>
             </a:br>
@@ -2700,6 +2764,10 @@
               <a:rPr lang="ko-KR" altLang="en-US" b="1" dirty="0"/>
               <a:t>무엇을 했는가</a:t>
             </a:r>
+            <a:r>
+              <a:rPr lang="ko-KR" altLang="en-US" dirty="0"/>
+              <a:t/>
+            </a:r>
             <a:br>
               <a:rPr lang="ko-KR" altLang="en-US" dirty="0"/>
             </a:br>
@@ -2737,6 +2805,10 @@
               <a:rPr lang="ko-KR" altLang="en-US" b="1" dirty="0"/>
               <a:t>구체적 영향</a:t>
             </a:r>
+            <a:r>
+              <a:rPr lang="ko-KR" altLang="en-US" dirty="0"/>
+              <a:t/>
+            </a:r>
             <a:br>
               <a:rPr lang="ko-KR" altLang="en-US" dirty="0"/>
             </a:br>
@@ -2758,6 +2830,10 @@
               <a:rPr lang="ko-KR" altLang="en-US" b="1" dirty="0"/>
               <a:t>의미</a:t>
             </a:r>
+            <a:r>
+              <a:rPr lang="ko-KR" altLang="en-US" dirty="0"/>
+              <a:t/>
+            </a:r>
             <a:br>
               <a:rPr lang="ko-KR" altLang="en-US" dirty="0"/>
             </a:br>
@@ -2795,6 +2871,10 @@
               <a:rPr lang="ko-KR" altLang="en-US" b="1" dirty="0"/>
               <a:t>강의 핵심</a:t>
             </a:r>
+            <a:r>
+              <a:rPr lang="ko-KR" altLang="en-US" dirty="0"/>
+              <a:t/>
+            </a:r>
             <a:br>
               <a:rPr lang="ko-KR" altLang="en-US" dirty="0"/>
             </a:br>
@@ -2846,6 +2926,10 @@
               <a:rPr lang="ko-KR" altLang="en-US" b="1" dirty="0"/>
               <a:t>무엇을 했는가</a:t>
             </a:r>
+            <a:r>
+              <a:rPr lang="ko-KR" altLang="en-US" dirty="0"/>
+              <a:t/>
+            </a:r>
             <a:br>
               <a:rPr lang="ko-KR" altLang="en-US" dirty="0"/>
             </a:br>
@@ -2891,6 +2975,10 @@
               <a:rPr lang="ko-KR" altLang="en-US" b="1" dirty="0"/>
               <a:t>밝혀낸 것</a:t>
             </a:r>
+            <a:r>
+              <a:rPr lang="ko-KR" altLang="en-US" dirty="0"/>
+              <a:t/>
+            </a:r>
             <a:br>
               <a:rPr lang="ko-KR" altLang="en-US" dirty="0"/>
             </a:br>
@@ -2920,6 +3008,10 @@
               <a:rPr lang="ko-KR" altLang="en-US" b="1" dirty="0"/>
               <a:t>의미</a:t>
             </a:r>
+            <a:r>
+              <a:rPr lang="ko-KR" altLang="en-US" dirty="0"/>
+              <a:t/>
+            </a:r>
             <a:br>
               <a:rPr lang="ko-KR" altLang="en-US" dirty="0"/>
             </a:br>
@@ -2941,6 +3033,10 @@
               <a:rPr lang="ko-KR" altLang="en-US" b="1" dirty="0"/>
               <a:t>강의 핵심</a:t>
             </a:r>
+            <a:r>
+              <a:rPr lang="ko-KR" altLang="en-US" dirty="0"/>
+              <a:t/>
+            </a:r>
             <a:br>
               <a:rPr lang="ko-KR" altLang="en-US" dirty="0"/>
             </a:br>
@@ -3020,6 +3116,10 @@
               <a:rPr lang="ko-KR" altLang="en-US" b="1" dirty="0"/>
               <a:t>무엇을 했는가</a:t>
             </a:r>
+            <a:r>
+              <a:rPr lang="ko-KR" altLang="en-US" dirty="0"/>
+              <a:t/>
+            </a:r>
             <a:br>
               <a:rPr lang="ko-KR" altLang="en-US" dirty="0"/>
             </a:br>
@@ -3049,6 +3149,10 @@
               <a:rPr lang="ko-KR" altLang="en-US" b="1" dirty="0"/>
               <a:t>밝혀낸 것</a:t>
             </a:r>
+            <a:r>
+              <a:rPr lang="ko-KR" altLang="en-US" dirty="0"/>
+              <a:t/>
+            </a:r>
             <a:br>
               <a:rPr lang="ko-KR" altLang="en-US" dirty="0"/>
             </a:br>
@@ -3070,6 +3174,10 @@
               <a:rPr lang="ko-KR" altLang="en-US" b="1" dirty="0"/>
               <a:t>의미</a:t>
             </a:r>
+            <a:r>
+              <a:rPr lang="ko-KR" altLang="en-US" dirty="0"/>
+              <a:t/>
+            </a:r>
             <a:br>
               <a:rPr lang="ko-KR" altLang="en-US" dirty="0"/>
             </a:br>
@@ -3099,6 +3207,10 @@
               <a:rPr lang="ko-KR" altLang="en-US" b="1" dirty="0"/>
               <a:t>강의 핵심</a:t>
             </a:r>
+            <a:r>
+              <a:rPr lang="ko-KR" altLang="en-US" dirty="0"/>
+              <a:t/>
+            </a:r>
             <a:br>
               <a:rPr lang="ko-KR" altLang="en-US" dirty="0"/>
             </a:br>
@@ -3142,6 +3254,10 @@
               <a:rPr lang="ko-KR" altLang="en-US" b="1" dirty="0"/>
               <a:t>무엇을 했는가</a:t>
             </a:r>
+            <a:r>
+              <a:rPr lang="ko-KR" altLang="en-US" dirty="0"/>
+              <a:t/>
+            </a:r>
             <a:br>
               <a:rPr lang="ko-KR" altLang="en-US" dirty="0"/>
             </a:br>
@@ -3246,6 +3362,10 @@
               <a:rPr lang="ko-KR" altLang="en-US" b="1" dirty="0"/>
               <a:t>밝혀낸 것</a:t>
             </a:r>
+            <a:r>
+              <a:rPr lang="ko-KR" altLang="en-US" dirty="0"/>
+              <a:t/>
+            </a:r>
             <a:br>
               <a:rPr lang="ko-KR" altLang="en-US" dirty="0"/>
             </a:br>
@@ -3298,6 +3418,10 @@
               <a:rPr lang="ko-KR" altLang="en-US" b="1" dirty="0"/>
               <a:t>의미</a:t>
             </a:r>
+            <a:r>
+              <a:rPr lang="ko-KR" altLang="en-US" dirty="0"/>
+              <a:t/>
+            </a:r>
             <a:br>
               <a:rPr lang="ko-KR" altLang="en-US" dirty="0"/>
             </a:br>
@@ -3334,6 +3458,10 @@
               <a:rPr lang="ko-KR" altLang="en-US" b="1" dirty="0"/>
               <a:t>강의 핵심</a:t>
             </a:r>
+            <a:r>
+              <a:rPr lang="ko-KR" altLang="en-US" dirty="0"/>
+              <a:t/>
+            </a:r>
             <a:br>
               <a:rPr lang="ko-KR" altLang="en-US" dirty="0"/>
             </a:br>
@@ -3495,6 +3623,10 @@
               <a:rPr lang="ko-KR" altLang="en-US" b="1" dirty="0"/>
               <a:t>의미</a:t>
             </a:r>
+            <a:r>
+              <a:rPr lang="ko-KR" altLang="en-US" dirty="0"/>
+              <a:t/>
+            </a:r>
             <a:br>
               <a:rPr lang="ko-KR" altLang="en-US" dirty="0"/>
             </a:br>
@@ -3524,6 +3656,10 @@
               <a:rPr lang="ko-KR" altLang="en-US" b="1" dirty="0"/>
               <a:t>강의 핵심</a:t>
             </a:r>
+            <a:r>
+              <a:rPr lang="ko-KR" altLang="en-US" dirty="0"/>
+              <a:t/>
+            </a:r>
             <a:br>
               <a:rPr lang="ko-KR" altLang="en-US" dirty="0"/>
             </a:br>
@@ -3626,6 +3762,10 @@
               <a:rPr lang="ko-KR" altLang="en-US" b="1" dirty="0"/>
               <a:t>구조적 변화</a:t>
             </a:r>
+            <a:r>
+              <a:rPr lang="ko-KR" altLang="en-US" dirty="0"/>
+              <a:t/>
+            </a:r>
             <a:br>
               <a:rPr lang="ko-KR" altLang="en-US" dirty="0"/>
             </a:br>
@@ -3682,6 +3822,10 @@
               <a:rPr lang="ko-KR" altLang="en-US" b="1" dirty="0"/>
               <a:t>의미</a:t>
             </a:r>
+            <a:r>
+              <a:rPr lang="ko-KR" altLang="en-US" dirty="0"/>
+              <a:t/>
+            </a:r>
             <a:br>
               <a:rPr lang="ko-KR" altLang="en-US" dirty="0"/>
             </a:br>
@@ -3703,6 +3847,10 @@
             <a:r>
               <a:rPr lang="ko-KR" altLang="en-US" b="1" dirty="0"/>
               <a:t>강의 핵심</a:t>
+            </a:r>
+            <a:r>
+              <a:rPr lang="ko-KR" altLang="en-US" dirty="0"/>
+              <a:t/>
             </a:r>
             <a:br>
               <a:rPr lang="ko-KR" altLang="en-US" dirty="0"/>
@@ -4760,7 +4908,7 @@
               <a:buNone/>
             </a:pPr>
             <a:r>
-              <a:rPr lang="en-US" sz="1300" dirty="0">
+              <a:rPr lang="en-US" sz="1300" dirty="0" smtClean="0">
                 <a:solidFill>
                   <a:srgbClr val="93C5FD"/>
                 </a:solidFill>
@@ -4768,7 +4916,7 @@
                 <a:ea typeface="Arial" pitchFamily="34" charset="-122"/>
                 <a:cs typeface="Arial" pitchFamily="34" charset="-120"/>
               </a:rPr>
-              <a:t>2025 Spring</a:t>
+              <a:t>2026</a:t>
             </a:r>
             <a:endParaRPr lang="en-US" sz="1300" dirty="0"/>
           </a:p>
